--- a/Lab/课程总体要求.pptx
+++ b/Lab/课程总体要求.pptx
@@ -3826,7 +3826,7 @@
                 <a:ea typeface="华文仿宋" panose="02010600040101010101" charset="-122"/>
                 <a:cs typeface="华文仿宋" panose="02010600040101010101" charset="-122"/>
               </a:rPr>
-              <a:t>Philosober</a:t>
+              <a:t>ccloud0525</a:t>
             </a:r>
             <a:r>
               <a:rPr lang="en-US" altLang="zh-CN" dirty="0">
